--- a/~sasano/lecture/proglang/26/proglang3.pptx
+++ b/~sasano/lecture/proglang/26/proglang3.pptx
@@ -231,7 +231,7 @@
             <a:fld id="{F61AC52B-4C5B-4329-B70A-EF9B7E71F231}" type="datetimeFigureOut">
               <a:rPr kumimoji="1" lang="ja-JP" altLang="en-US" smtClean="0"/>
               <a:pPr/>
-              <a:t>2025/10/28</a:t>
+              <a:t>2026/9/28</a:t>
             </a:fld>
             <a:endParaRPr kumimoji="1" lang="ja-JP" altLang="en-US"/>
           </a:p>
@@ -795,7 +795,7 @@
             <a:fld id="{E90ED720-0104-4369-84BC-D37694168613}" type="datetimeFigureOut">
               <a:rPr kumimoji="1" lang="ja-JP" altLang="en-US" smtClean="0"/>
               <a:pPr/>
-              <a:t>2025/10/28</a:t>
+              <a:t>2026/9/28</a:t>
             </a:fld>
             <a:endParaRPr kumimoji="1" lang="ja-JP" altLang="en-US"/>
           </a:p>
@@ -992,7 +992,7 @@
             <a:fld id="{E90ED720-0104-4369-84BC-D37694168613}" type="datetimeFigureOut">
               <a:rPr kumimoji="1" lang="ja-JP" altLang="en-US" smtClean="0"/>
               <a:pPr/>
-              <a:t>2025/10/28</a:t>
+              <a:t>2026/9/28</a:t>
             </a:fld>
             <a:endParaRPr kumimoji="1" lang="ja-JP" altLang="en-US"/>
           </a:p>
@@ -1199,7 +1199,7 @@
             <a:fld id="{E90ED720-0104-4369-84BC-D37694168613}" type="datetimeFigureOut">
               <a:rPr kumimoji="1" lang="ja-JP" altLang="en-US" smtClean="0"/>
               <a:pPr/>
-              <a:t>2025/10/28</a:t>
+              <a:t>2026/9/28</a:t>
             </a:fld>
             <a:endParaRPr kumimoji="1" lang="ja-JP" altLang="en-US"/>
           </a:p>
@@ -1396,7 +1396,7 @@
             <a:fld id="{E90ED720-0104-4369-84BC-D37694168613}" type="datetimeFigureOut">
               <a:rPr kumimoji="1" lang="ja-JP" altLang="en-US" smtClean="0"/>
               <a:pPr/>
-              <a:t>2025/10/28</a:t>
+              <a:t>2026/9/28</a:t>
             </a:fld>
             <a:endParaRPr kumimoji="1" lang="ja-JP" altLang="en-US"/>
           </a:p>
@@ -1638,7 +1638,7 @@
             <a:fld id="{E90ED720-0104-4369-84BC-D37694168613}" type="datetimeFigureOut">
               <a:rPr kumimoji="1" lang="ja-JP" altLang="en-US" smtClean="0"/>
               <a:pPr/>
-              <a:t>2025/10/28</a:t>
+              <a:t>2026/9/28</a:t>
             </a:fld>
             <a:endParaRPr kumimoji="1" lang="ja-JP" altLang="en-US"/>
           </a:p>
@@ -1984,7 +1984,7 @@
             <a:fld id="{E90ED720-0104-4369-84BC-D37694168613}" type="datetimeFigureOut">
               <a:rPr kumimoji="1" lang="ja-JP" altLang="en-US" smtClean="0"/>
               <a:pPr/>
-              <a:t>2025/10/28</a:t>
+              <a:t>2026/9/28</a:t>
             </a:fld>
             <a:endParaRPr kumimoji="1" lang="ja-JP" altLang="en-US"/>
           </a:p>
@@ -2464,7 +2464,7 @@
             <a:fld id="{E90ED720-0104-4369-84BC-D37694168613}" type="datetimeFigureOut">
               <a:rPr kumimoji="1" lang="ja-JP" altLang="en-US" smtClean="0"/>
               <a:pPr/>
-              <a:t>2025/10/28</a:t>
+              <a:t>2026/9/28</a:t>
             </a:fld>
             <a:endParaRPr kumimoji="1" lang="ja-JP" altLang="en-US"/>
           </a:p>
@@ -2578,7 +2578,7 @@
             <a:fld id="{E90ED720-0104-4369-84BC-D37694168613}" type="datetimeFigureOut">
               <a:rPr kumimoji="1" lang="ja-JP" altLang="en-US" smtClean="0"/>
               <a:pPr/>
-              <a:t>2025/10/28</a:t>
+              <a:t>2026/9/28</a:t>
             </a:fld>
             <a:endParaRPr kumimoji="1" lang="ja-JP" altLang="en-US"/>
           </a:p>
@@ -2670,7 +2670,7 @@
             <a:fld id="{E90ED720-0104-4369-84BC-D37694168613}" type="datetimeFigureOut">
               <a:rPr kumimoji="1" lang="ja-JP" altLang="en-US" smtClean="0"/>
               <a:pPr/>
-              <a:t>2025/10/28</a:t>
+              <a:t>2026/9/28</a:t>
             </a:fld>
             <a:endParaRPr kumimoji="1" lang="ja-JP" altLang="en-US"/>
           </a:p>
@@ -2974,7 +2974,7 @@
             <a:fld id="{E90ED720-0104-4369-84BC-D37694168613}" type="datetimeFigureOut">
               <a:rPr kumimoji="1" lang="ja-JP" altLang="en-US" smtClean="0"/>
               <a:pPr/>
-              <a:t>2025/10/28</a:t>
+              <a:t>2026/9/28</a:t>
             </a:fld>
             <a:endParaRPr kumimoji="1" lang="ja-JP" altLang="en-US"/>
           </a:p>
@@ -3223,7 +3223,7 @@
             <a:fld id="{E90ED720-0104-4369-84BC-D37694168613}" type="datetimeFigureOut">
               <a:rPr kumimoji="1" lang="ja-JP" altLang="en-US" smtClean="0"/>
               <a:pPr/>
-              <a:t>2025/10/28</a:t>
+              <a:t>2026/9/28</a:t>
             </a:fld>
             <a:endParaRPr kumimoji="1" lang="ja-JP" altLang="en-US"/>
           </a:p>
@@ -3463,7 +3463,7 @@
             <a:fld id="{E90ED720-0104-4369-84BC-D37694168613}" type="datetimeFigureOut">
               <a:rPr kumimoji="1" lang="ja-JP" altLang="en-US" smtClean="0"/>
               <a:pPr/>
-              <a:t>2025/10/28</a:t>
+              <a:t>2026/9/28</a:t>
             </a:fld>
             <a:endParaRPr kumimoji="1" lang="ja-JP" altLang="en-US"/>
           </a:p>
@@ -3923,8 +3923,8 @@
         </p:nvSpPr>
         <p:spPr>
           <a:xfrm>
-            <a:off x="2442508" y="5447813"/>
-            <a:ext cx="4112023" cy="584775"/>
+            <a:off x="3756858" y="5416282"/>
+            <a:ext cx="1688283" cy="584775"/>
           </a:xfrm>
           <a:prstGeom prst="rect">
             <a:avLst/>
@@ -3937,17 +3937,14 @@
           </a:bodyPr>
           <a:lstStyle/>
           <a:p>
+            <a:pPr algn="ctr"/>
+            <a:r>
+              <a:rPr kumimoji="1" lang="ja-JP" altLang="en-US" sz="3200"/>
+              <a:t>篠埜　</a:t>
+            </a:r>
             <a:r>
               <a:rPr kumimoji="1" lang="ja-JP" altLang="en-US" sz="3200" dirty="0"/>
-              <a:t>情報工学科</a:t>
-            </a:r>
-            <a:r>
-              <a:rPr lang="ja-JP" altLang="en-US" sz="3200" dirty="0"/>
-              <a:t>    </a:t>
-            </a:r>
-            <a:r>
-              <a:rPr kumimoji="1" lang="ja-JP" altLang="en-US" sz="3200" dirty="0"/>
-              <a:t>篠埜　功</a:t>
+              <a:t>功</a:t>
             </a:r>
           </a:p>
         </p:txBody>
